--- a/classes/parte-10-seguridad-en-la-nube-y-contenedores/232-seguridad-serverless/clase-232-presentacion.pptx
+++ b/classes/parte-10-seguridad-en-la-nube-y-contenedores/232-seguridad-serverless/clase-232-presentacion.pptx
@@ -17,6 +17,10 @@
     <p:sldId id="265" r:id="rId16"/>
     <p:sldId id="266" r:id="rId17"/>
     <p:sldId id="267" r:id="rId18"/>
+    <p:sldId id="268" r:id="rId19"/>
+    <p:sldId id="269" r:id="rId20"/>
+    <p:sldId id="270" r:id="rId21"/>
+    <p:sldId id="271" r:id="rId22"/>
   </p:sldIdLst>
   <p:sldSz cx="9144000" cy="6858000" type="screen4x3"/>
   <p:notesSz cx="6858000" cy="9144000"/>
@@ -3198,7 +3202,7 @@
                   <a:srgbClr val="0B3D2E"/>
                 </a:solidFill>
               </a:rPr>
-              <a:t>⚠️ Errores comunes</a:t>
+              <a:t>🧪 Laboratorio guiado</a:t>
             </a:r>
           </a:p>
         </p:txBody>
@@ -3236,67 +3240,97 @@
                   <a:srgbClr val="22282E"/>
                 </a:solidFill>
               </a:rPr>
-              <a:t>•  Función con AdministratorAccess — Rol reutilizado y excesivo; crea un rol mínimo por función.</a:t>
-            </a:r>
-          </a:p>
-          <a:p>
-            <a:pPr>
-              <a:spcAft>
-                <a:spcPts val="600"/>
-              </a:spcAft>
-            </a:pPr>
-            <a:r>
-              <a:rPr sz="1500">
-                <a:solidFill>
-                  <a:srgbClr val="22282E"/>
-                </a:solidFill>
-              </a:rPr>
-              <a:t>•  Secreto legible en la consola — Guardado en variable de entorno en claro; muévelo a un gestor de secretos.</a:t>
-            </a:r>
-          </a:p>
-          <a:p>
-            <a:pPr>
-              <a:spcAft>
-                <a:spcPts val="600"/>
-              </a:spcAft>
-            </a:pPr>
-            <a:r>
-              <a:rPr sz="1500">
-                <a:solidFill>
-                  <a:srgbClr val="22282E"/>
-                </a:solidFill>
-              </a:rPr>
-              <a:t>•  Factura disparada de repente — Denial-of-wallet o bucle de eventos; limita concurrencia y añade alarmas de coste.</a:t>
-            </a:r>
-          </a:p>
-          <a:p>
-            <a:pPr>
-              <a:spcAft>
-                <a:spcPts val="600"/>
-              </a:spcAft>
-            </a:pPr>
-            <a:r>
-              <a:rPr sz="1500">
-                <a:solidFill>
-                  <a:srgbClr val="22282E"/>
-                </a:solidFill>
-              </a:rPr>
-              <a:t>•  Inyección vía payload del evento — Entrada no saneada; valida esquema y parametriza consultas.</a:t>
-            </a:r>
-          </a:p>
-          <a:p>
-            <a:pPr>
-              <a:spcAft>
-                <a:spcPts val="600"/>
-              </a:spcAft>
-            </a:pPr>
-            <a:r>
-              <a:rPr sz="1500">
-                <a:solidFill>
-                  <a:srgbClr val="22282E"/>
-                </a:solidFill>
-              </a:rPr>
-              <a:t>•  CVE en una dependencia del bundle — Paquete vulnerable empaquetado; escanea y actualiza en cada build.</a:t>
+              <a:t>•  Despliega una función simple (p. ej. procesa un objeto subido a un bucket) con Serverless Framework en tu cuenta de laboratorio.</a:t>
+            </a:r>
+          </a:p>
+          <a:p>
+            <a:pPr>
+              <a:spcAft>
+                <a:spcPts val="600"/>
+              </a:spcAft>
+            </a:pPr>
+            <a:r>
+              <a:rPr sz="1500">
+                <a:solidFill>
+                  <a:srgbClr val="22282E"/>
+                </a:solidFill>
+              </a:rPr>
+              <a:t>•  Revisa su rol de ejecución: si tiene permisos amplios, recórtalo a solo las acciones necesarias (leer ese bucket, escribir en esa cola).</a:t>
+            </a:r>
+          </a:p>
+          <a:p>
+            <a:pPr>
+              <a:spcAft>
+                <a:spcPts val="600"/>
+              </a:spcAft>
+            </a:pPr>
+            <a:r>
+              <a:rPr sz="1500">
+                <a:solidFill>
+                  <a:srgbClr val="22282E"/>
+                </a:solidFill>
+              </a:rPr>
+              <a:t>•  Event injection: añade a la función una consulta construida con datos del evento sin sanear y demuestra la inyección (en laboratorio); luego parametriza/valida la entrada y confirma la mitigación.</a:t>
+            </a:r>
+          </a:p>
+          <a:p>
+            <a:pPr>
+              <a:spcAft>
+                <a:spcPts val="600"/>
+              </a:spcAft>
+            </a:pPr>
+            <a:r>
+              <a:rPr sz="1500">
+                <a:solidFill>
+                  <a:srgbClr val="22282E"/>
+                </a:solidFill>
+              </a:rPr>
+              <a:t>•  Mueve un "secreto" de una variable de entorno a un gestor de secretos (Secrets Manager/Key Vault) y recupéralo en runtime con permisos mínimos.</a:t>
+            </a:r>
+          </a:p>
+          <a:p>
+            <a:pPr>
+              <a:spcAft>
+                <a:spcPts val="600"/>
+              </a:spcAft>
+            </a:pPr>
+            <a:r>
+              <a:rPr sz="1500">
+                <a:solidFill>
+                  <a:srgbClr val="22282E"/>
+                </a:solidFill>
+              </a:rPr>
+              <a:t>•  Escanea las dependencias del paquete con pip-audit/npm audit/Trivy y actualiza las vulnerables.</a:t>
+            </a:r>
+          </a:p>
+          <a:p>
+            <a:pPr>
+              <a:spcAft>
+                <a:spcPts val="600"/>
+              </a:spcAft>
+            </a:pPr>
+            <a:r>
+              <a:rPr sz="1500">
+                <a:solidFill>
+                  <a:srgbClr val="22282E"/>
+                </a:solidFill>
+              </a:rPr>
+              <a:t>•  Configura límites de concurrencia y presupuesto/alarma de coste para mitigar denial-of-wallet.</a:t>
+            </a:r>
+          </a:p>
+          <a:p>
+            <a:pPr>
+              <a:spcAft>
+                <a:spcPts val="600"/>
+              </a:spcAft>
+            </a:pPr>
+            <a:r>
+              <a:rPr sz="1500">
+                <a:solidFill>
+                  <a:srgbClr val="22282E"/>
+                </a:solidFill>
+              </a:rPr>
+              <a:t>•  Habilita trazas (X-Ray/Application Insights) y logs estructurados; provoca un error y compruébalo en el log.</a:t>
             </a:r>
           </a:p>
         </p:txBody>
@@ -3347,7 +3381,7 @@
                   <a:srgbClr val="0B3D2E"/>
                 </a:solidFill>
               </a:rPr>
-              <a:t>❓ Preguntas frecuentes</a:t>
+              <a:t>✍️ Ejercicios</a:t>
             </a:r>
           </a:p>
         </p:txBody>
@@ -3385,82 +3419,82 @@
                   <a:srgbClr val="22282E"/>
                 </a:solidFill>
               </a:rPr>
-              <a:t>•  ❓ ¿Serverless es más seguro porque no hay servidor?</a:t>
-            </a:r>
-          </a:p>
-          <a:p>
-            <a:pPr>
-              <a:spcAft>
-                <a:spcPts val="600"/>
-              </a:spcAft>
-            </a:pPr>
-            <a:r>
-              <a:rPr sz="1500">
-                <a:solidFill>
-                  <a:srgbClr val="22282E"/>
-                </a:solidFill>
-              </a:rPr>
-              <a:t>•  El proveedor asume el parcheo del SO y del runtime, lo que elimina una clase de problemas. Pero la superficie se traslada al código, a los permisos IAM, a los eventos y a las dependencias, que siguen siendo tu responsabilidad.</a:t>
-            </a:r>
-          </a:p>
-          <a:p>
-            <a:pPr>
-              <a:spcAft>
-                <a:spcPts val="600"/>
-              </a:spcAft>
-            </a:pPr>
-            <a:r>
-              <a:rPr sz="1500">
-                <a:solidFill>
-                  <a:srgbClr val="22282E"/>
-                </a:solidFill>
-              </a:rPr>
-              <a:t>•  ❓ ¿Las variables de entorno sirven para secretos?</a:t>
-            </a:r>
-          </a:p>
-          <a:p>
-            <a:pPr>
-              <a:spcAft>
-                <a:spcPts val="600"/>
-              </a:spcAft>
-            </a:pPr>
-            <a:r>
-              <a:rPr sz="1500">
-                <a:solidFill>
-                  <a:srgbClr val="22282E"/>
-                </a:solidFill>
-              </a:rPr>
-              <a:t>•  No como almacén seguro: son visibles para quien pueda leer la configuración de la función y pueden filtrarse en logs. Usa un gestor de secretos y concede a la función permiso mínimo para leerlos en runtime.</a:t>
-            </a:r>
-          </a:p>
-          <a:p>
-            <a:pPr>
-              <a:spcAft>
-                <a:spcPts val="600"/>
-              </a:spcAft>
-            </a:pPr>
-            <a:r>
-              <a:rPr sz="1500">
-                <a:solidFill>
-                  <a:srgbClr val="22282E"/>
-                </a:solidFill>
-              </a:rPr>
-              <a:t>•  ❓ ¿Qué es denial-of-wallet y por qué preocupa en serverless?</a:t>
-            </a:r>
-          </a:p>
-          <a:p>
-            <a:pPr>
-              <a:spcAft>
-                <a:spcPts val="600"/>
-              </a:spcAft>
-            </a:pPr>
-            <a:r>
-              <a:rPr sz="1500">
-                <a:solidFill>
-                  <a:srgbClr val="22282E"/>
-                </a:solidFill>
-              </a:rPr>
-              <a:t>•  Es un abuso que no busca tumbar el servicio sino disparar el número de invocaciones y, con ello, el coste. Se mitiga con límites de concurrencia, throttling en el API Gateway y alarmas/presupuestos de coste.</a:t>
+              <a:t>•  Reescribe un rol de ejecución amplio a privilegio mínimo para un caso concreto.</a:t>
+            </a:r>
+          </a:p>
+          <a:p>
+            <a:pPr>
+              <a:spcAft>
+                <a:spcPts val="600"/>
+              </a:spcAft>
+            </a:pPr>
+            <a:r>
+              <a:rPr sz="1500">
+                <a:solidFill>
+                  <a:srgbClr val="22282E"/>
+                </a:solidFill>
+              </a:rPr>
+              <a:t>•  Valida y sanea el payload de un evento HTTP antes de usarlo en una consulta.</a:t>
+            </a:r>
+          </a:p>
+          <a:p>
+            <a:pPr>
+              <a:spcAft>
+                <a:spcPts val="600"/>
+              </a:spcAft>
+            </a:pPr>
+            <a:r>
+              <a:rPr sz="1500">
+                <a:solidFill>
+                  <a:srgbClr val="22282E"/>
+                </a:solidFill>
+              </a:rPr>
+              <a:t>•  Migra tres secretos de variables de entorno a un gestor de secretos.</a:t>
+            </a:r>
+          </a:p>
+          <a:p>
+            <a:pPr>
+              <a:spcAft>
+                <a:spcPts val="600"/>
+              </a:spcAft>
+            </a:pPr>
+            <a:r>
+              <a:rPr sz="1500">
+                <a:solidFill>
+                  <a:srgbClr val="22282E"/>
+                </a:solidFill>
+              </a:rPr>
+              <a:t>•  Añade un límite de concurrencia y una alarma de coste a una función.</a:t>
+            </a:r>
+          </a:p>
+          <a:p>
+            <a:pPr>
+              <a:spcAft>
+                <a:spcPts val="600"/>
+              </a:spcAft>
+            </a:pPr>
+            <a:r>
+              <a:rPr sz="1500">
+                <a:solidFill>
+                  <a:srgbClr val="22282E"/>
+                </a:solidFill>
+              </a:rPr>
+              <a:t>•  Escanea el bundle de la función y corrige una dependencia vulnerable.</a:t>
+            </a:r>
+          </a:p>
+          <a:p>
+            <a:pPr>
+              <a:spcAft>
+                <a:spcPts val="600"/>
+              </a:spcAft>
+            </a:pPr>
+            <a:r>
+              <a:rPr sz="1500">
+                <a:solidFill>
+                  <a:srgbClr val="22282E"/>
+                </a:solidFill>
+              </a:rPr>
+              <a:t>•  Diseña una regla de detección para invocaciones anómalas de una función.</a:t>
             </a:r>
           </a:p>
         </p:txBody>
@@ -3511,7 +3545,7 @@
                   <a:srgbClr val="0B3D2E"/>
                 </a:solidFill>
               </a:rPr>
-              <a:t>🔗 Referencias</a:t>
+              <a:t>📝 Reto verificable</a:t>
             </a:r>
           </a:p>
         </p:txBody>
@@ -3549,71 +3583,608 @@
                   <a:srgbClr val="22282E"/>
                 </a:solidFill>
               </a:rPr>
-              <a:t>•  OWASP Serverless Top 10. &lt;https://owasp.org/www-project-serverless-top-10/&gt;</a:t>
-            </a:r>
-          </a:p>
-          <a:p>
-            <a:pPr>
-              <a:spcAft>
-                <a:spcPts val="600"/>
-              </a:spcAft>
-            </a:pPr>
-            <a:r>
-              <a:rPr sz="1500">
-                <a:solidFill>
-                  <a:srgbClr val="22282E"/>
-                </a:solidFill>
-              </a:rPr>
-              <a:t>•  AWS Lambda — Security overview. &lt;https://docs.aws.amazon.com/lambda/latest/dg/lambda-security.html&gt;</a:t>
-            </a:r>
-          </a:p>
-          <a:p>
-            <a:pPr>
-              <a:spcAft>
-                <a:spcPts val="600"/>
-              </a:spcAft>
-            </a:pPr>
-            <a:r>
-              <a:rPr sz="1500">
-                <a:solidFill>
-                  <a:srgbClr val="22282E"/>
-                </a:solidFill>
-              </a:rPr>
-              <a:t>•  Azure Functions security. &lt;https://learn.microsoft.com/azure/azure-functions/security-concepts&gt;</a:t>
-            </a:r>
-          </a:p>
-          <a:p>
-            <a:pPr>
-              <a:spcAft>
-                <a:spcPts val="600"/>
-              </a:spcAft>
-            </a:pPr>
-            <a:r>
-              <a:rPr sz="1500">
-                <a:solidFill>
-                  <a:srgbClr val="22282E"/>
-                </a:solidFill>
-              </a:rPr>
-              <a:t>•  Google Cloud Functions — Securing. &lt;https://cloud.google.com/functions/docs/securing&gt;</a:t>
-            </a:r>
-          </a:p>
-          <a:p>
-            <a:pPr>
-              <a:spcAft>
-                <a:spcPts val="600"/>
-              </a:spcAft>
-            </a:pPr>
-            <a:r>
-              <a:rPr sz="1500">
-                <a:solidFill>
-                  <a:srgbClr val="22282E"/>
-                </a:solidFill>
-              </a:rPr>
-              <a:t>•  OWASP — Serverless Security Cheat Sheet. &lt;https://cheatsheetseries.owasp.org/&gt;</a:t>
-            </a:r>
-          </a:p>
-        </p:txBody>
-      </p:sp>
+              <a:t>•  Endurece una función serverless de laboratorio: rol de ejecución mínimo y exclusivo, entrada validada,</a:t>
+            </a:r>
+          </a:p>
+          <a:p>
+            <a:pPr>
+              <a:spcAft>
+                <a:spcPts val="600"/>
+              </a:spcAft>
+            </a:pPr>
+            <a:r>
+              <a:rPr sz="1500">
+                <a:solidFill>
+                  <a:srgbClr val="22282E"/>
+                </a:solidFill>
+              </a:rPr>
+              <a:t>•  secretos fuera de las variables de entorno, dependencias sin CVEs críticas y límite de concurrencia.</a:t>
+            </a:r>
+          </a:p>
+          <a:p>
+            <a:pPr>
+              <a:spcAft>
+                <a:spcPts val="600"/>
+              </a:spcAft>
+            </a:pPr>
+            <a:r>
+              <a:rPr sz="1500">
+                <a:solidFill>
+                  <a:srgbClr val="22282E"/>
+                </a:solidFill>
+              </a:rPr>
+              <a:t>•  Criterio de aceptación: el rol de la función solo permite las acciones estrictamente necesarias</a:t>
+            </a:r>
+          </a:p>
+          <a:p>
+            <a:pPr>
+              <a:spcAft>
+                <a:spcPts val="600"/>
+              </a:spcAft>
+            </a:pPr>
+            <a:r>
+              <a:rPr sz="1500">
+                <a:solidFill>
+                  <a:srgbClr val="22282E"/>
+                </a:solidFill>
+              </a:rPr>
+              <a:t>•  (verificable con la política), el ataque de event injection ya no funciona, no hay secretos en las</a:t>
+            </a:r>
+          </a:p>
+          <a:p>
+            <a:pPr>
+              <a:spcAft>
+                <a:spcPts val="600"/>
+              </a:spcAft>
+            </a:pPr>
+            <a:r>
+              <a:rPr sz="1500">
+                <a:solidFill>
+                  <a:srgbClr val="22282E"/>
+                </a:solidFill>
+              </a:rPr>
+              <a:t>•  variables de entorno y pip-audit/npm audit no reporta vulnerabilidades críticas.</a:t>
+            </a:r>
+          </a:p>
+        </p:txBody>
+      </p:sp>
+    </p:spTree>
+  </p:cSld>
+  <p:clrMapOvr>
+    <a:masterClrMapping/>
+  </p:clrMapOvr>
+</p:sld>
+</file>
+
+<file path=ppt/slides/slide13.xml><?xml version="1.0" encoding="utf-8"?>
+<p:sld xmlns:a="http://schemas.openxmlformats.org/drawingml/2006/main" xmlns:p="http://schemas.openxmlformats.org/presentationml/2006/main" xmlns:r="http://schemas.openxmlformats.org/officeDocument/2006/relationships">
+  <p:cSld>
+    <p:spTree>
+      <p:nvGrpSpPr>
+        <p:cNvPr id="1" name=""/>
+        <p:cNvGrpSpPr/>
+        <p:nvPr/>
+      </p:nvGrpSpPr>
+      <p:grpSpPr/>
+      <p:sp>
+        <p:nvSpPr>
+          <p:cNvPr id="2" name="TextBox 1"/>
+          <p:cNvSpPr txBox="1"/>
+          <p:nvPr/>
+        </p:nvSpPr>
+        <p:spPr>
+          <a:xfrm>
+            <a:off x="457200" y="320040"/>
+            <a:ext cx="8229600" cy="822960"/>
+          </a:xfrm>
+          <a:prstGeom prst="rect">
+            <a:avLst/>
+          </a:prstGeom>
+          <a:noFill/>
+        </p:spPr>
+        <p:txBody>
+          <a:bodyPr wrap="square">
+            <a:spAutoFit/>
+          </a:bodyPr>
+          <a:lstStyle/>
+          <a:p>
+            <a:r>
+              <a:rPr sz="2600" b="1">
+                <a:solidFill>
+                  <a:srgbClr val="0B3D2E"/>
+                </a:solidFill>
+              </a:rPr>
+              <a:t>⚠️ Errores comunes</a:t>
+            </a:r>
+          </a:p>
+        </p:txBody>
+      </p:sp>
+      <p:sp>
+        <p:nvSpPr>
+          <p:cNvPr id="3" name="TextBox 2"/>
+          <p:cNvSpPr txBox="1"/>
+          <p:nvPr/>
+        </p:nvSpPr>
+        <p:spPr>
+          <a:xfrm>
+            <a:off x="457200" y="1280160"/>
+            <a:ext cx="8229600" cy="4937760"/>
+          </a:xfrm>
+          <a:prstGeom prst="rect">
+            <a:avLst/>
+          </a:prstGeom>
+          <a:noFill/>
+        </p:spPr>
+        <p:txBody>
+          <a:bodyPr wrap="square">
+            <a:spAutoFit/>
+          </a:bodyPr>
+          <a:lstStyle/>
+          <a:p>
+            <a:pPr>
+              <a:spcAft>
+                <a:spcPts val="600"/>
+              </a:spcAft>
+            </a:pPr>
+            <a:r>
+              <a:rPr sz="1500">
+                <a:solidFill>
+                  <a:srgbClr val="22282E"/>
+                </a:solidFill>
+              </a:rPr>
+              <a:t>•  Función con AdministratorAccess — Rol reutilizado y excesivo; crea un rol mínimo por función.</a:t>
+            </a:r>
+          </a:p>
+          <a:p>
+            <a:pPr>
+              <a:spcAft>
+                <a:spcPts val="600"/>
+              </a:spcAft>
+            </a:pPr>
+            <a:r>
+              <a:rPr sz="1500">
+                <a:solidFill>
+                  <a:srgbClr val="22282E"/>
+                </a:solidFill>
+              </a:rPr>
+              <a:t>•  Secreto legible en la consola — Guardado en variable de entorno en claro; muévelo a un gestor de secretos.</a:t>
+            </a:r>
+          </a:p>
+          <a:p>
+            <a:pPr>
+              <a:spcAft>
+                <a:spcPts val="600"/>
+              </a:spcAft>
+            </a:pPr>
+            <a:r>
+              <a:rPr sz="1500">
+                <a:solidFill>
+                  <a:srgbClr val="22282E"/>
+                </a:solidFill>
+              </a:rPr>
+              <a:t>•  Factura disparada de repente — Denial-of-wallet o bucle de eventos; limita concurrencia y añade alarmas de coste.</a:t>
+            </a:r>
+          </a:p>
+          <a:p>
+            <a:pPr>
+              <a:spcAft>
+                <a:spcPts val="600"/>
+              </a:spcAft>
+            </a:pPr>
+            <a:r>
+              <a:rPr sz="1500">
+                <a:solidFill>
+                  <a:srgbClr val="22282E"/>
+                </a:solidFill>
+              </a:rPr>
+              <a:t>•  Inyección vía payload del evento — Entrada no saneada; valida esquema y parametriza consultas.</a:t>
+            </a:r>
+          </a:p>
+          <a:p>
+            <a:pPr>
+              <a:spcAft>
+                <a:spcPts val="600"/>
+              </a:spcAft>
+            </a:pPr>
+            <a:r>
+              <a:rPr sz="1500">
+                <a:solidFill>
+                  <a:srgbClr val="22282E"/>
+                </a:solidFill>
+              </a:rPr>
+              <a:t>•  CVE en una dependencia del bundle — Paquete vulnerable empaquetado; escanea y actualiza en cada build.</a:t>
+            </a:r>
+          </a:p>
+        </p:txBody>
+      </p:sp>
+    </p:spTree>
+  </p:cSld>
+  <p:clrMapOvr>
+    <a:masterClrMapping/>
+  </p:clrMapOvr>
+</p:sld>
+</file>
+
+<file path=ppt/slides/slide14.xml><?xml version="1.0" encoding="utf-8"?>
+<p:sld xmlns:a="http://schemas.openxmlformats.org/drawingml/2006/main" xmlns:p="http://schemas.openxmlformats.org/presentationml/2006/main" xmlns:r="http://schemas.openxmlformats.org/officeDocument/2006/relationships">
+  <p:cSld>
+    <p:spTree>
+      <p:nvGrpSpPr>
+        <p:cNvPr id="1" name=""/>
+        <p:cNvGrpSpPr/>
+        <p:nvPr/>
+      </p:nvGrpSpPr>
+      <p:grpSpPr/>
+      <p:sp>
+        <p:nvSpPr>
+          <p:cNvPr id="2" name="TextBox 1"/>
+          <p:cNvSpPr txBox="1"/>
+          <p:nvPr/>
+        </p:nvSpPr>
+        <p:spPr>
+          <a:xfrm>
+            <a:off x="457200" y="320040"/>
+            <a:ext cx="8229600" cy="822960"/>
+          </a:xfrm>
+          <a:prstGeom prst="rect">
+            <a:avLst/>
+          </a:prstGeom>
+          <a:noFill/>
+        </p:spPr>
+        <p:txBody>
+          <a:bodyPr wrap="square">
+            <a:spAutoFit/>
+          </a:bodyPr>
+          <a:lstStyle/>
+          <a:p>
+            <a:r>
+              <a:rPr sz="2600" b="1">
+                <a:solidFill>
+                  <a:srgbClr val="0B3D2E"/>
+                </a:solidFill>
+              </a:rPr>
+              <a:t>❓ Preguntas frecuentes</a:t>
+            </a:r>
+          </a:p>
+        </p:txBody>
+      </p:sp>
+      <p:sp>
+        <p:nvSpPr>
+          <p:cNvPr id="3" name="TextBox 2"/>
+          <p:cNvSpPr txBox="1"/>
+          <p:nvPr/>
+        </p:nvSpPr>
+        <p:spPr>
+          <a:xfrm>
+            <a:off x="457200" y="1280160"/>
+            <a:ext cx="8229600" cy="4937760"/>
+          </a:xfrm>
+          <a:prstGeom prst="rect">
+            <a:avLst/>
+          </a:prstGeom>
+          <a:noFill/>
+        </p:spPr>
+        <p:txBody>
+          <a:bodyPr wrap="square">
+            <a:spAutoFit/>
+          </a:bodyPr>
+          <a:lstStyle/>
+          <a:p>
+            <a:pPr>
+              <a:spcAft>
+                <a:spcPts val="600"/>
+              </a:spcAft>
+            </a:pPr>
+            <a:r>
+              <a:rPr sz="1500">
+                <a:solidFill>
+                  <a:srgbClr val="22282E"/>
+                </a:solidFill>
+              </a:rPr>
+              <a:t>•  ❓ ¿Serverless es más seguro porque no hay servidor?</a:t>
+            </a:r>
+          </a:p>
+          <a:p>
+            <a:pPr>
+              <a:spcAft>
+                <a:spcPts val="600"/>
+              </a:spcAft>
+            </a:pPr>
+            <a:r>
+              <a:rPr sz="1500">
+                <a:solidFill>
+                  <a:srgbClr val="22282E"/>
+                </a:solidFill>
+              </a:rPr>
+              <a:t>•  El proveedor asume el parcheo del SO y del runtime, lo que elimina una clase de problemas. Pero la superficie se traslada al código, a los permisos IAM, a los eventos y a las dependencias, que siguen…</a:t>
+            </a:r>
+          </a:p>
+          <a:p>
+            <a:pPr>
+              <a:spcAft>
+                <a:spcPts val="600"/>
+              </a:spcAft>
+            </a:pPr>
+            <a:r>
+              <a:rPr sz="1500">
+                <a:solidFill>
+                  <a:srgbClr val="22282E"/>
+                </a:solidFill>
+              </a:rPr>
+              <a:t>•  ❓ ¿Las variables de entorno sirven para secretos?</a:t>
+            </a:r>
+          </a:p>
+          <a:p>
+            <a:pPr>
+              <a:spcAft>
+                <a:spcPts val="600"/>
+              </a:spcAft>
+            </a:pPr>
+            <a:r>
+              <a:rPr sz="1500">
+                <a:solidFill>
+                  <a:srgbClr val="22282E"/>
+                </a:solidFill>
+              </a:rPr>
+              <a:t>•  No como almacén seguro: son visibles para quien pueda leer la configuración de la función y pueden filtrarse en logs. Usa un gestor de secretos y concede a la función permiso mínimo para leerlos en…</a:t>
+            </a:r>
+          </a:p>
+          <a:p>
+            <a:pPr>
+              <a:spcAft>
+                <a:spcPts val="600"/>
+              </a:spcAft>
+            </a:pPr>
+            <a:r>
+              <a:rPr sz="1500">
+                <a:solidFill>
+                  <a:srgbClr val="22282E"/>
+                </a:solidFill>
+              </a:rPr>
+              <a:t>•  ❓ ¿Qué es denial-of-wallet y por qué preocupa en serverless?</a:t>
+            </a:r>
+          </a:p>
+          <a:p>
+            <a:pPr>
+              <a:spcAft>
+                <a:spcPts val="600"/>
+              </a:spcAft>
+            </a:pPr>
+            <a:r>
+              <a:rPr sz="1500">
+                <a:solidFill>
+                  <a:srgbClr val="22282E"/>
+                </a:solidFill>
+              </a:rPr>
+              <a:t>•  Es un abuso que no busca tumbar el servicio sino disparar el número de invocaciones y, con ello, el coste. Se mitiga con límites de concurrencia, throttling en el API Gateway y alarmas/presupuestos…</a:t>
+            </a:r>
+          </a:p>
+        </p:txBody>
+      </p:sp>
+    </p:spTree>
+  </p:cSld>
+  <p:clrMapOvr>
+    <a:masterClrMapping/>
+  </p:clrMapOvr>
+</p:sld>
+</file>
+
+<file path=ppt/slides/slide15.xml><?xml version="1.0" encoding="utf-8"?>
+<p:sld xmlns:a="http://schemas.openxmlformats.org/drawingml/2006/main" xmlns:p="http://schemas.openxmlformats.org/presentationml/2006/main" xmlns:r="http://schemas.openxmlformats.org/officeDocument/2006/relationships">
+  <p:cSld>
+    <p:spTree>
+      <p:nvGrpSpPr>
+        <p:cNvPr id="1" name=""/>
+        <p:cNvGrpSpPr/>
+        <p:nvPr/>
+      </p:nvGrpSpPr>
+      <p:grpSpPr/>
+      <p:sp>
+        <p:nvSpPr>
+          <p:cNvPr id="2" name="TextBox 1"/>
+          <p:cNvSpPr txBox="1"/>
+          <p:nvPr/>
+        </p:nvSpPr>
+        <p:spPr>
+          <a:xfrm>
+            <a:off x="457200" y="320040"/>
+            <a:ext cx="8229600" cy="822960"/>
+          </a:xfrm>
+          <a:prstGeom prst="rect">
+            <a:avLst/>
+          </a:prstGeom>
+          <a:noFill/>
+        </p:spPr>
+        <p:txBody>
+          <a:bodyPr wrap="square">
+            <a:spAutoFit/>
+          </a:bodyPr>
+          <a:lstStyle/>
+          <a:p>
+            <a:r>
+              <a:rPr sz="2600" b="1">
+                <a:solidFill>
+                  <a:srgbClr val="0B3D2E"/>
+                </a:solidFill>
+              </a:rPr>
+              <a:t>🔗 Referencias verificables y alcance</a:t>
+            </a:r>
+          </a:p>
+        </p:txBody>
+      </p:sp>
+      <p:sp>
+        <p:nvSpPr>
+          <p:cNvPr id="3" name="TextBox 2"/>
+          <p:cNvSpPr txBox="1"/>
+          <p:nvPr/>
+        </p:nvSpPr>
+        <p:spPr>
+          <a:xfrm>
+            <a:off x="457200" y="1280160"/>
+            <a:ext cx="8229600" cy="4937760"/>
+          </a:xfrm>
+          <a:prstGeom prst="rect">
+            <a:avLst/>
+          </a:prstGeom>
+          <a:noFill/>
+        </p:spPr>
+        <p:txBody>
+          <a:bodyPr wrap="square">
+            <a:spAutoFit/>
+          </a:bodyPr>
+          <a:lstStyle/>
+          <a:p>
+            <a:pPr>
+              <a:spcAft>
+                <a:spcPts val="600"/>
+              </a:spcAft>
+            </a:pPr>
+            <a:r>
+              <a:rPr sz="1500">
+                <a:solidFill>
+                  <a:srgbClr val="22282E"/>
+                </a:solidFill>
+              </a:rPr>
+              <a:t>•  AWS Lambda — Security. &lt;https://docs.aws.amazon.com/lambda/latest/dg/lambda-security.html&gt; — modelo y controles oficiales AWS; confirmar integración específica de cada trigger.</a:t>
+            </a:r>
+          </a:p>
+          <a:p>
+            <a:pPr>
+              <a:spcAft>
+                <a:spcPts val="600"/>
+              </a:spcAft>
+            </a:pPr>
+            <a:r>
+              <a:rPr sz="1500">
+                <a:solidFill>
+                  <a:srgbClr val="22282E"/>
+                </a:solidFill>
+              </a:rPr>
+              <a:t>•  Azure Functions security. &lt;https://learn.microsoft.com/azure/azure-functions/security-concepts&gt; — recomendaciones oficiales de identidad, red y secretos.</a:t>
+            </a:r>
+          </a:p>
+          <a:p>
+            <a:pPr>
+              <a:spcAft>
+                <a:spcPts val="600"/>
+              </a:spcAft>
+            </a:pPr>
+            <a:r>
+              <a:rPr sz="1500">
+                <a:solidFill>
+                  <a:srgbClr val="22282E"/>
+                </a:solidFill>
+              </a:rPr>
+              <a:t>•  Google Cloud Run functions security. &lt;https://cloud.google.com/functions/docs/securing&gt; — autenticación y protección oficial del servicio vigente.</a:t>
+            </a:r>
+          </a:p>
+          <a:p>
+            <a:pPr>
+              <a:spcAft>
+                <a:spcPts val="600"/>
+              </a:spcAft>
+            </a:pPr>
+            <a:r>
+              <a:rPr sz="1500">
+                <a:solidFill>
+                  <a:srgbClr val="22282E"/>
+                </a:solidFill>
+              </a:rPr>
+              <a:t>•  OWASP Serverless Top 10. &lt;https://owasp.org/www-project-serverless-top-10/&gt; — taxonomía comunitaria para modelado; no ranking universal de frecuencia.</a:t>
+            </a:r>
+          </a:p>
+          <a:p>
+            <a:pPr>
+              <a:spcAft>
+                <a:spcPts val="600"/>
+              </a:spcAft>
+            </a:pPr>
+            <a:r>
+              <a:rPr sz="1500">
+                <a:solidFill>
+                  <a:srgbClr val="22282E"/>
+                </a:solidFill>
+              </a:rPr>
+              <a:t>•  OWASP Serverless Security Cheat Sheet. &lt;https://cheatsheetseries.owasp.org/cheatsheets/ServerlessFaaSSecurityCheatSheet.html&gt; — prácticas complementarias para eventos, permisos y observabilidad.</a:t>
+            </a:r>
+          </a:p>
+        </p:txBody>
+      </p:sp>
+    </p:spTree>
+  </p:cSld>
+  <p:clrMapOvr>
+    <a:masterClrMapping/>
+  </p:clrMapOvr>
+</p:sld>
+</file>
+
+<file path=ppt/slides/slide16.xml><?xml version="1.0" encoding="utf-8"?>
+<p:sld xmlns:a="http://schemas.openxmlformats.org/drawingml/2006/main" xmlns:p="http://schemas.openxmlformats.org/presentationml/2006/main" xmlns:r="http://schemas.openxmlformats.org/officeDocument/2006/relationships">
+  <p:cSld>
+    <p:spTree>
+      <p:nvGrpSpPr>
+        <p:cNvPr id="1" name=""/>
+        <p:cNvGrpSpPr/>
+        <p:nvPr/>
+      </p:nvGrpSpPr>
+      <p:grpSpPr/>
+      <p:sp>
+        <p:nvSpPr>
+          <p:cNvPr id="2" name="TextBox 1"/>
+          <p:cNvSpPr txBox="1"/>
+          <p:nvPr/>
+        </p:nvSpPr>
+        <p:spPr>
+          <a:xfrm>
+            <a:off x="457200" y="274320"/>
+            <a:ext cx="8229600" cy="640080"/>
+          </a:xfrm>
+          <a:prstGeom prst="rect">
+            <a:avLst/>
+          </a:prstGeom>
+          <a:noFill/>
+        </p:spPr>
+        <p:txBody>
+          <a:bodyPr wrap="square">
+            <a:spAutoFit/>
+          </a:bodyPr>
+          <a:lstStyle/>
+          <a:p>
+            <a:r>
+              <a:rPr sz="2200" b="1">
+                <a:solidFill>
+                  <a:srgbClr val="0B3D2E"/>
+                </a:solidFill>
+              </a:rPr>
+              <a:t>Diagrama de la clase</a:t>
+            </a:r>
+          </a:p>
+        </p:txBody>
+      </p:sp>
+      <p:pic>
+        <p:nvPicPr>
+          <p:cNvPr id="3" name="Picture 2" descr="5e32193cd5d89e36.png"/>
+          <p:cNvPicPr>
+            <a:picLocks noChangeAspect="1"/>
+          </p:cNvPicPr>
+          <p:nvPr/>
+        </p:nvPicPr>
+        <p:blipFill>
+          <a:blip r:embed="rId2"/>
+          <a:stretch>
+            <a:fillRect/>
+          </a:stretch>
+        </p:blipFill>
+        <p:spPr>
+          <a:xfrm>
+            <a:off x="457200" y="2427732"/>
+            <a:ext cx="8229600" cy="2642616"/>
+          </a:xfrm>
+          <a:prstGeom prst="rect">
+            <a:avLst/>
+          </a:prstGeom>
+        </p:spPr>
+      </p:pic>
     </p:spTree>
   </p:cSld>
   <p:clrMapOvr>
@@ -4071,7 +4642,7 @@
                   <a:srgbClr val="22282E"/>
                 </a:solidFill>
               </a:rPr>
-              <a:t>•  6 — Denial-of-Wallet</a:t>
+              <a:t>•  6 — Abuso de concurrencia y costo</a:t>
             </a:r>
           </a:p>
           <a:p>
@@ -4137,7 +4708,7 @@
                   <a:srgbClr val="0B3D2E"/>
                 </a:solidFill>
               </a:rPr>
-              <a:t>📖 Definiciones y características</a:t>
+              <a:t>🧠 Explicación en profundidad</a:t>
             </a:r>
           </a:p>
         </p:txBody>
@@ -4175,97 +4746,82 @@
                   <a:srgbClr val="22282E"/>
                 </a:solidFill>
               </a:rPr>
-              <a:t>•  Función como servicio (FaaS): código que corre bajo demanda sin gestionar servidores. Clave: no parcheas SO, pero sí el código y sus permisos.</a:t>
-            </a:r>
-          </a:p>
-          <a:p>
-            <a:pPr>
-              <a:spcAft>
-                <a:spcPts val="600"/>
-              </a:spcAft>
-            </a:pPr>
-            <a:r>
-              <a:rPr sz="1500">
-                <a:solidFill>
-                  <a:srgbClr val="22282E"/>
-                </a:solidFill>
-              </a:rPr>
-              <a:t>•  Trigger/evento: fuente que invoca la función (HTTP, cola, objeto en bucket). Clave: el payload del evento es entrada no confiable.</a:t>
-            </a:r>
-          </a:p>
-          <a:p>
-            <a:pPr>
-              <a:spcAft>
-                <a:spcPts val="600"/>
-              </a:spcAft>
-            </a:pPr>
-            <a:r>
-              <a:rPr sz="1500">
-                <a:solidFill>
-                  <a:srgbClr val="22282E"/>
-                </a:solidFill>
-              </a:rPr>
-              <a:t>•  Rol de ejecución: identidad IAM que asume la función. Clave: debe ser mínimo y exclusivo por función.</a:t>
-            </a:r>
-          </a:p>
-          <a:p>
-            <a:pPr>
-              <a:spcAft>
-                <a:spcPts val="600"/>
-              </a:spcAft>
-            </a:pPr>
-            <a:r>
-              <a:rPr sz="1500">
-                <a:solidFill>
-                  <a:srgbClr val="22282E"/>
-                </a:solidFill>
-              </a:rPr>
-              <a:t>•  Event injection: inyección a través del payload del evento. Clave: valida y sanea todo evento entrante.</a:t>
-            </a:r>
-          </a:p>
-          <a:p>
-            <a:pPr>
-              <a:spcAft>
-                <a:spcPts val="600"/>
-              </a:spcAft>
-            </a:pPr>
-            <a:r>
-              <a:rPr sz="1500">
-                <a:solidFill>
-                  <a:srgbClr val="22282E"/>
-                </a:solidFill>
-              </a:rPr>
-              <a:t>•  Denial-of-Wallet: abuso que multiplica invocaciones y coste. Clave: limita concurrencia y presupuesto.</a:t>
-            </a:r>
-          </a:p>
-          <a:p>
-            <a:pPr>
-              <a:spcAft>
-                <a:spcPts val="600"/>
-              </a:spcAft>
-            </a:pPr>
-            <a:r>
-              <a:rPr sz="1500">
-                <a:solidFill>
-                  <a:srgbClr val="22282E"/>
-                </a:solidFill>
-              </a:rPr>
-              <a:t>•  Cold start: primera invocación tras inactividad. Clave: relevante para timeouts y para no cachear secretos inseguros.</a:t>
-            </a:r>
-          </a:p>
-          <a:p>
-            <a:pPr>
-              <a:spcAft>
-                <a:spcPts val="600"/>
-              </a:spcAft>
-            </a:pPr>
-            <a:r>
-              <a:rPr sz="1500">
-                <a:solidFill>
-                  <a:srgbClr val="22282E"/>
-                </a:solidFill>
-              </a:rPr>
-              <a:t>•  Variables de entorno: config inyectada en la función. Clave: no son secretas por sí solas; usa un gestor de secretos y cifrado.</a:t>
+              <a:t>•  Serverless elimina la administración directa de servidores para el cliente, no la responsabilidad sobre código, dependencias, eventos, identidad, configuración y datos. La unidad de amenaza no es…</a:t>
+            </a:r>
+          </a:p>
+          <a:p>
+            <a:pPr>
+              <a:spcAft>
+                <a:spcPts val="600"/>
+              </a:spcAft>
+            </a:pPr>
+            <a:r>
+              <a:rPr sz="1500">
+                <a:solidFill>
+                  <a:srgbClr val="22282E"/>
+                </a:solidFill>
+              </a:rPr>
+              <a:t>•  El diagrama sitúa validación antes del código y controles operativos alrededor. Un evento emitido por un servicio cloud todavía puede contener datos controlados por un usuario. Autenticar el origen…</a:t>
+            </a:r>
+          </a:p>
+          <a:p>
+            <a:pPr>
+              <a:spcAft>
+                <a:spcPts val="600"/>
+              </a:spcAft>
+            </a:pPr>
+            <a:r>
+              <a:rPr sz="1500">
+                <a:solidFill>
+                  <a:srgbClr val="22282E"/>
+                </a:solidFill>
+              </a:rPr>
+              <a:t>•  Reutilizar un rol amplio entre funciones mezcla blast radius. Cada función o grupo coherente obtiene acciones y recursos mínimos, con condiciones cuando sean estables. También se protege quién puede…</a:t>
+            </a:r>
+          </a:p>
+          <a:p>
+            <a:pPr>
+              <a:spcAft>
+                <a:spcPts val="600"/>
+              </a:spcAft>
+            </a:pPr>
+            <a:r>
+              <a:rPr sz="1500">
+                <a:solidFill>
+                  <a:srgbClr val="22282E"/>
+                </a:solidFill>
+              </a:rPr>
+              <a:t>•  Los eventos se validan por esquema, tamaño, tipos, identificadores y relación con el recurso esperado. En flujos asíncronos se consideran reintentos, idempotencia, orden, dead-letter queues y poison…</a:t>
+            </a:r>
+          </a:p>
+          <a:p>
+            <a:pPr>
+              <a:spcAft>
+                <a:spcPts val="600"/>
+              </a:spcAft>
+            </a:pPr>
+            <a:r>
+              <a:rPr sz="1500">
+                <a:solidFill>
+                  <a:srgbClr val="22282E"/>
+                </a:solidFill>
+              </a:rPr>
+              <a:t>•  Un atacante o error puede generar invocaciones, fan-out o bucles entre servicios. «Denial-of-wallet» es una etiqueta útil, pero el efecto puede incluir throttling y caída. Se usan límites de…</a:t>
+            </a:r>
+          </a:p>
+          <a:p>
+            <a:pPr>
+              <a:spcAft>
+                <a:spcPts val="600"/>
+              </a:spcAft>
+            </a:pPr>
+            <a:r>
+              <a:rPr sz="1500">
+                <a:solidFill>
+                  <a:srgbClr val="22282E"/>
+                </a:solidFill>
+              </a:rPr>
+              <a:t>•  Variables de entorno pueden cifrarse en reposo, pero suelen ser legibles para identidades con permisos de configuración o para el proceso. Se usa un gestor y cache controlado con rotación.…</a:t>
             </a:r>
           </a:p>
         </p:txBody>
@@ -4316,7 +4872,7 @@
                   <a:srgbClr val="0B3D2E"/>
                 </a:solidFill>
               </a:rPr>
-              <a:t>🧰 Herramientas y preparación</a:t>
+              <a:t>📖 Definiciones y características</a:t>
             </a:r>
           </a:p>
         </p:txBody>
@@ -4354,82 +4910,97 @@
                   <a:srgbClr val="22282E"/>
                 </a:solidFill>
               </a:rPr>
-              <a:t>•  Una cuenta de laboratorio con AWS Lambda (o Azure Functions / Cloud Functions).</a:t>
-            </a:r>
-          </a:p>
-          <a:p>
-            <a:pPr>
-              <a:spcAft>
-                <a:spcPts val="600"/>
-              </a:spcAft>
-            </a:pPr>
-            <a:r>
-              <a:rPr sz="1500">
-                <a:solidFill>
-                  <a:srgbClr val="22282E"/>
-                </a:solidFill>
-              </a:rPr>
-              <a:t>•  Serverless Framework o SAM para desplegar; cfn-nag/Checkov para revisar plantillas.</a:t>
-            </a:r>
-          </a:p>
-          <a:p>
-            <a:pPr>
-              <a:spcAft>
-                <a:spcPts val="600"/>
-              </a:spcAft>
-            </a:pPr>
-            <a:r>
-              <a:rPr sz="1500">
-                <a:solidFill>
-                  <a:srgbClr val="22282E"/>
-                </a:solidFill>
-              </a:rPr>
-              <a:t>•  Un escáner de dependencias (p. ej. npm audit, pip-audit, Trivy) y un gestor de secretos (clase 233).</a:t>
-            </a:r>
-          </a:p>
-          <a:p>
-            <a:pPr>
-              <a:spcAft>
-                <a:spcPts val="600"/>
-              </a:spcAft>
-            </a:pPr>
-            <a:r>
-              <a:rPr sz="1500">
-                <a:solidFill>
-                  <a:srgbClr val="22282E"/>
-                </a:solidFill>
-              </a:rPr>
-              <a:t>•  aws lambda get-function --function-name mi-func \</a:t>
-            </a:r>
-          </a:p>
-          <a:p>
-            <a:pPr>
-              <a:spcAft>
-                <a:spcPts val="600"/>
-              </a:spcAft>
-            </a:pPr>
-            <a:r>
-              <a:rPr sz="1500">
-                <a:solidFill>
-                  <a:srgbClr val="22282E"/>
-                </a:solidFill>
-              </a:rPr>
-              <a:t>•  --query 'Configuration.Role'</a:t>
-            </a:r>
-          </a:p>
-          <a:p>
-            <a:pPr>
-              <a:spcAft>
-                <a:spcPts val="600"/>
-              </a:spcAft>
-            </a:pPr>
-            <a:r>
-              <a:rPr sz="1500">
-                <a:solidFill>
-                  <a:srgbClr val="22282E"/>
-                </a:solidFill>
-              </a:rPr>
-              <a:t>•  pip-audit -r requirements.txt</a:t>
+              <a:t>•  Función como servicio (FaaS): código que corre bajo demanda sin gestionar servidores. Clave: no parcheas SO, pero sí el código y sus permisos.</a:t>
+            </a:r>
+          </a:p>
+          <a:p>
+            <a:pPr>
+              <a:spcAft>
+                <a:spcPts val="600"/>
+              </a:spcAft>
+            </a:pPr>
+            <a:r>
+              <a:rPr sz="1500">
+                <a:solidFill>
+                  <a:srgbClr val="22282E"/>
+                </a:solidFill>
+              </a:rPr>
+              <a:t>•  Trigger/evento: fuente que invoca la función (HTTP, cola, objeto en bucket). Clave: el payload del evento es entrada no confiable.</a:t>
+            </a:r>
+          </a:p>
+          <a:p>
+            <a:pPr>
+              <a:spcAft>
+                <a:spcPts val="600"/>
+              </a:spcAft>
+            </a:pPr>
+            <a:r>
+              <a:rPr sz="1500">
+                <a:solidFill>
+                  <a:srgbClr val="22282E"/>
+                </a:solidFill>
+              </a:rPr>
+              <a:t>•  Rol de ejecución: identidad IAM que asume la función. Clave: debe ser mínimo y exclusivo por función.</a:t>
+            </a:r>
+          </a:p>
+          <a:p>
+            <a:pPr>
+              <a:spcAft>
+                <a:spcPts val="600"/>
+              </a:spcAft>
+            </a:pPr>
+            <a:r>
+              <a:rPr sz="1500">
+                <a:solidFill>
+                  <a:srgbClr val="22282E"/>
+                </a:solidFill>
+              </a:rPr>
+              <a:t>•  Event injection: uso de campos de un evento para alterar una operación posterior. Clave: autenticar origen, validar esquema y usar APIs seguras resuelven riesgos diferentes.</a:t>
+            </a:r>
+          </a:p>
+          <a:p>
+            <a:pPr>
+              <a:spcAft>
+                <a:spcPts val="600"/>
+              </a:spcAft>
+            </a:pPr>
+            <a:r>
+              <a:rPr sz="1500">
+                <a:solidFill>
+                  <a:srgbClr val="22282E"/>
+                </a:solidFill>
+              </a:rPr>
+              <a:t>•  Abuso de costo/concurrencia: invocaciones, fan-out o bucles que consumen cuota y presupuesto. Clave: combina límites, idempotencia, alertas y protección en la fuente.</a:t>
+            </a:r>
+          </a:p>
+          <a:p>
+            <a:pPr>
+              <a:spcAft>
+                <a:spcPts val="600"/>
+              </a:spcAft>
+            </a:pPr>
+            <a:r>
+              <a:rPr sz="1500">
+                <a:solidFill>
+                  <a:srgbClr val="22282E"/>
+                </a:solidFill>
+              </a:rPr>
+              <a:t>•  Cold start: primera invocación tras inactividad. Clave: relevante para timeouts y para no cachear secretos inseguros.</a:t>
+            </a:r>
+          </a:p>
+          <a:p>
+            <a:pPr>
+              <a:spcAft>
+                <a:spcPts val="600"/>
+              </a:spcAft>
+            </a:pPr>
+            <a:r>
+              <a:rPr sz="1500">
+                <a:solidFill>
+                  <a:srgbClr val="22282E"/>
+                </a:solidFill>
+              </a:rPr>
+              <a:t>•  Variables de entorno: config inyectada en la función. Clave: no son secretas por sí solas; usa un gestor de secretos y cifrado.</a:t>
             </a:r>
           </a:p>
         </p:txBody>
@@ -4480,7 +5051,7 @@
                   <a:srgbClr val="0B3D2E"/>
                 </a:solidFill>
               </a:rPr>
-              <a:t>🧪 Laboratorio guiado</a:t>
+              <a:t>🔍 Caso razonado — objeto que dispara un bucle</a:t>
             </a:r>
           </a:p>
         </p:txBody>
@@ -4518,97 +5089,22 @@
                   <a:srgbClr val="22282E"/>
                 </a:solidFill>
               </a:rPr>
-              <a:t>•  Despliega una función simple (p. ej. procesa un objeto subido a un bucket) con Serverless Framework en tu cuenta de laboratorio.</a:t>
-            </a:r>
-          </a:p>
-          <a:p>
-            <a:pPr>
-              <a:spcAft>
-                <a:spcPts val="600"/>
-              </a:spcAft>
-            </a:pPr>
-            <a:r>
-              <a:rPr sz="1500">
-                <a:solidFill>
-                  <a:srgbClr val="22282E"/>
-                </a:solidFill>
-              </a:rPr>
-              <a:t>•  Revisa su rol de ejecución: si tiene permisos amplios, recórtalo a solo las acciones necesarias (leer ese bucket, escribir en esa cola).</a:t>
-            </a:r>
-          </a:p>
-          <a:p>
-            <a:pPr>
-              <a:spcAft>
-                <a:spcPts val="600"/>
-              </a:spcAft>
-            </a:pPr>
-            <a:r>
-              <a:rPr sz="1500">
-                <a:solidFill>
-                  <a:srgbClr val="22282E"/>
-                </a:solidFill>
-              </a:rPr>
-              <a:t>•  Event injection: añade a la función una consulta construida con datos del evento sin sanear y demuestra la inyección (en laboratorio); luego parametriza/valida la entrada y confirma la mitigación.</a:t>
-            </a:r>
-          </a:p>
-          <a:p>
-            <a:pPr>
-              <a:spcAft>
-                <a:spcPts val="600"/>
-              </a:spcAft>
-            </a:pPr>
-            <a:r>
-              <a:rPr sz="1500">
-                <a:solidFill>
-                  <a:srgbClr val="22282E"/>
-                </a:solidFill>
-              </a:rPr>
-              <a:t>•  Mueve un "secreto" de una variable de entorno a un gestor de secretos (Secrets Manager/Key Vault) y recupéralo en runtime con permisos mínimos.</a:t>
-            </a:r>
-          </a:p>
-          <a:p>
-            <a:pPr>
-              <a:spcAft>
-                <a:spcPts val="600"/>
-              </a:spcAft>
-            </a:pPr>
-            <a:r>
-              <a:rPr sz="1500">
-                <a:solidFill>
-                  <a:srgbClr val="22282E"/>
-                </a:solidFill>
-              </a:rPr>
-              <a:t>•  Escanea las dependencias del paquete con pip-audit/npm audit/Trivy y actualiza las vulnerables.</a:t>
-            </a:r>
-          </a:p>
-          <a:p>
-            <a:pPr>
-              <a:spcAft>
-                <a:spcPts val="600"/>
-              </a:spcAft>
-            </a:pPr>
-            <a:r>
-              <a:rPr sz="1500">
-                <a:solidFill>
-                  <a:srgbClr val="22282E"/>
-                </a:solidFill>
-              </a:rPr>
-              <a:t>•  Configura límites de concurrencia y presupuesto/alarma de coste para mitigar denial-of-wallet.</a:t>
-            </a:r>
-          </a:p>
-          <a:p>
-            <a:pPr>
-              <a:spcAft>
-                <a:spcPts val="600"/>
-              </a:spcAft>
-            </a:pPr>
-            <a:r>
-              <a:rPr sz="1500">
-                <a:solidFill>
-                  <a:srgbClr val="22282E"/>
-                </a:solidFill>
-              </a:rPr>
-              <a:t>•  Habilita trazas (X-Ray/Application Insights) y logs estructurados; provoca un error y compruébalo en el log.</a:t>
+              <a:t>•  Una función transforma cada archivo subido y escribe el resultado en el mismo bucket/prefijo que activa el trigger. El archivo de salida vuelve a invocarla y produce un bucle. No es necesariamente un…</a:t>
+            </a:r>
+          </a:p>
+          <a:p>
+            <a:pPr>
+              <a:spcAft>
+                <a:spcPts val="600"/>
+              </a:spcAft>
+            </a:pPr>
+            <a:r>
+              <a:rPr sz="1500">
+                <a:solidFill>
+                  <a:srgbClr val="22282E"/>
+                </a:solidFill>
+              </a:rPr>
+              <a:t>•  La corrección separa prefijos o buckets, filtra eventos, agrega idempotencia y limita concurrencia. La prueba crea un objeto benigno, confirma una sola transformación, revisa métrica de invocaciones…</a:t>
             </a:r>
           </a:p>
         </p:txBody>
@@ -4659,7 +5155,7 @@
                   <a:srgbClr val="0B3D2E"/>
                 </a:solidFill>
               </a:rPr>
-              <a:t>✍️ Ejercicios</a:t>
+              <a:t>✅ Criterio de dominio</a:t>
             </a:r>
           </a:p>
         </p:txBody>
@@ -4697,82 +5193,7 @@
                   <a:srgbClr val="22282E"/>
                 </a:solidFill>
               </a:rPr>
-              <a:t>•  Reescribe un rol de ejecución amplio a privilegio mínimo para un caso concreto.</a:t>
-            </a:r>
-          </a:p>
-          <a:p>
-            <a:pPr>
-              <a:spcAft>
-                <a:spcPts val="600"/>
-              </a:spcAft>
-            </a:pPr>
-            <a:r>
-              <a:rPr sz="1500">
-                <a:solidFill>
-                  <a:srgbClr val="22282E"/>
-                </a:solidFill>
-              </a:rPr>
-              <a:t>•  Valida y sanea el payload de un evento HTTP antes de usarlo en una consulta.</a:t>
-            </a:r>
-          </a:p>
-          <a:p>
-            <a:pPr>
-              <a:spcAft>
-                <a:spcPts val="600"/>
-              </a:spcAft>
-            </a:pPr>
-            <a:r>
-              <a:rPr sz="1500">
-                <a:solidFill>
-                  <a:srgbClr val="22282E"/>
-                </a:solidFill>
-              </a:rPr>
-              <a:t>•  Migra tres secretos de variables de entorno a un gestor de secretos.</a:t>
-            </a:r>
-          </a:p>
-          <a:p>
-            <a:pPr>
-              <a:spcAft>
-                <a:spcPts val="600"/>
-              </a:spcAft>
-            </a:pPr>
-            <a:r>
-              <a:rPr sz="1500">
-                <a:solidFill>
-                  <a:srgbClr val="22282E"/>
-                </a:solidFill>
-              </a:rPr>
-              <a:t>•  Añade un límite de concurrencia y una alarma de coste a una función.</a:t>
-            </a:r>
-          </a:p>
-          <a:p>
-            <a:pPr>
-              <a:spcAft>
-                <a:spcPts val="600"/>
-              </a:spcAft>
-            </a:pPr>
-            <a:r>
-              <a:rPr sz="1500">
-                <a:solidFill>
-                  <a:srgbClr val="22282E"/>
-                </a:solidFill>
-              </a:rPr>
-              <a:t>•  Escanea el bundle de la función y corrige una dependencia vulnerable.</a:t>
-            </a:r>
-          </a:p>
-          <a:p>
-            <a:pPr>
-              <a:spcAft>
-                <a:spcPts val="600"/>
-              </a:spcAft>
-            </a:pPr>
-            <a:r>
-              <a:rPr sz="1500">
-                <a:solidFill>
-                  <a:srgbClr val="22282E"/>
-                </a:solidFill>
-              </a:rPr>
-              <a:t>•  Diseña una regla de detección para invocaciones anómalas de una función.</a:t>
+              <a:t>•  Dominas la clase cuando puedes modelar una cadena de evento completa, asignar rol mínimo por función, diseñar idempotencia y límites, entregar secretos sin exponerlos y demostrar con logs/métricas…</a:t>
             </a:r>
           </a:p>
         </p:txBody>
@@ -4823,7 +5244,7 @@
                   <a:srgbClr val="0B3D2E"/>
                 </a:solidFill>
               </a:rPr>
-              <a:t>📝 Reto verificable</a:t>
+              <a:t>🧰 Herramientas y preparación</a:t>
             </a:r>
           </a:p>
         </p:txBody>
@@ -4861,67 +5282,37 @@
                   <a:srgbClr val="22282E"/>
                 </a:solidFill>
               </a:rPr>
-              <a:t>•  Endurece una función serverless de laboratorio: rol de ejecución mínimo y exclusivo, entrada validada,</a:t>
-            </a:r>
-          </a:p>
-          <a:p>
-            <a:pPr>
-              <a:spcAft>
-                <a:spcPts val="600"/>
-              </a:spcAft>
-            </a:pPr>
-            <a:r>
-              <a:rPr sz="1500">
-                <a:solidFill>
-                  <a:srgbClr val="22282E"/>
-                </a:solidFill>
-              </a:rPr>
-              <a:t>•  secretos fuera de las variables de entorno, dependencias sin CVEs críticas y límite de concurrencia.</a:t>
-            </a:r>
-          </a:p>
-          <a:p>
-            <a:pPr>
-              <a:spcAft>
-                <a:spcPts val="600"/>
-              </a:spcAft>
-            </a:pPr>
-            <a:r>
-              <a:rPr sz="1500">
-                <a:solidFill>
-                  <a:srgbClr val="22282E"/>
-                </a:solidFill>
-              </a:rPr>
-              <a:t>•  Criterio de aceptación: el rol de la función solo permite las acciones estrictamente necesarias</a:t>
-            </a:r>
-          </a:p>
-          <a:p>
-            <a:pPr>
-              <a:spcAft>
-                <a:spcPts val="600"/>
-              </a:spcAft>
-            </a:pPr>
-            <a:r>
-              <a:rPr sz="1500">
-                <a:solidFill>
-                  <a:srgbClr val="22282E"/>
-                </a:solidFill>
-              </a:rPr>
-              <a:t>•  (verificable con la política), el ataque de event injection ya no funciona, no hay secretos en las</a:t>
-            </a:r>
-          </a:p>
-          <a:p>
-            <a:pPr>
-              <a:spcAft>
-                <a:spcPts val="600"/>
-              </a:spcAft>
-            </a:pPr>
-            <a:r>
-              <a:rPr sz="1500">
-                <a:solidFill>
-                  <a:srgbClr val="22282E"/>
-                </a:solidFill>
-              </a:rPr>
-              <a:t>•  variables de entorno y pip-audit/npm audit no reporta vulnerabilidades críticas.</a:t>
+              <a:t>•  Una cuenta de laboratorio con AWS Lambda (o Azure Functions / Cloud Functions).</a:t>
+            </a:r>
+          </a:p>
+          <a:p>
+            <a:pPr>
+              <a:spcAft>
+                <a:spcPts val="600"/>
+              </a:spcAft>
+            </a:pPr>
+            <a:r>
+              <a:rPr sz="1500">
+                <a:solidFill>
+                  <a:srgbClr val="22282E"/>
+                </a:solidFill>
+              </a:rPr>
+              <a:t>•  Serverless Framework o SAM para desplegar; cfn-nag/Checkov para revisar plantillas.</a:t>
+            </a:r>
+          </a:p>
+          <a:p>
+            <a:pPr>
+              <a:spcAft>
+                <a:spcPts val="600"/>
+              </a:spcAft>
+            </a:pPr>
+            <a:r>
+              <a:rPr sz="1500">
+                <a:solidFill>
+                  <a:srgbClr val="22282E"/>
+                </a:solidFill>
+              </a:rPr>
+              <a:t>•  Un escáner de dependencias (p. ej. npm audit, pip-audit, Trivy) y un gestor de secretos (clase 233).</a:t>
             </a:r>
           </a:p>
         </p:txBody>
